--- a/assets/Nonprofit_Impact_Intelligence_Lab.pptx
+++ b/assets/Nonprofit_Impact_Intelligence_Lab.pptx
@@ -3432,7 +3432,7 @@
               </a:defRPr>
             </a:pPr>
             <a:r>
-              <a:t>8 fictional countries | 6 programs | 240 sites | 24 periods | 23,740+ fact records</a:t>
+              <a:t>8 fictional countries | 6 programs | 240 sites | 24 periods | 23,744+ fact records</a:t>
             </a:r>
           </a:p>
         </p:txBody>

--- a/assets/Nonprofit_Impact_Intelligence_Lab.pptx
+++ b/assets/Nonprofit_Impact_Intelligence_Lab.pptx
@@ -3432,7 +3432,7 @@
               </a:defRPr>
             </a:pPr>
             <a:r>
-              <a:t>8 fictional countries | 6 programs | 240 sites | 24 periods | 23,744+ fact records</a:t>
+              <a:t>8 fictional countries | 6 programs | 240 sites | 24 periods | 23,745 fact records</a:t>
             </a:r>
           </a:p>
         </p:txBody>
